--- a/FixGrid_Pitch_Deck.pptx
+++ b/FixGrid_Pitch_Deck.pptx
@@ -4204,7 +4204,7 @@
                 <a:ea typeface="Arial" pitchFamily="34" charset="-122"/>
                 <a:cs typeface="Arial" pitchFamily="34" charset="-120"/>
               </a:rPr>
-              <a:t>THE PROBLEM</a:t>
+              <a:t>PROBLEM STATEMENT</a:t>
             </a:r>
             <a:endParaRPr lang="en-US" sz="850" dirty="0"/>
           </a:p>
@@ -4757,7 +4757,7 @@
                 <a:ea typeface="Arial" pitchFamily="34" charset="-122"/>
                 <a:cs typeface="Arial" pitchFamily="34" charset="-120"/>
               </a:rPr>
-              <a:t>THE SOLUTION</a:t>
+              <a:t>PROPOSED SOLUTION</a:t>
             </a:r>
             <a:endParaRPr lang="en-US" sz="850" dirty="0"/>
           </a:p>
